--- a/2025-03-31/02_companion app.pptx
+++ b/2025-03-31/02_companion app.pptx
@@ -5,10 +5,10 @@
     <p:sldMasterId id="2147483686" r:id="rId1"/>
   </p:sldMasterIdLst>
   <p:notesMasterIdLst>
-    <p:notesMasterId r:id="rId25"/>
+    <p:notesMasterId r:id="rId28"/>
   </p:notesMasterIdLst>
   <p:handoutMasterIdLst>
-    <p:handoutMasterId r:id="rId26"/>
+    <p:handoutMasterId r:id="rId29"/>
   </p:handoutMasterIdLst>
   <p:sldIdLst>
     <p:sldId id="1242" r:id="rId2"/>
@@ -31,9 +31,12 @@
     <p:sldId id="1259" r:id="rId19"/>
     <p:sldId id="1260" r:id="rId20"/>
     <p:sldId id="1261" r:id="rId21"/>
-    <p:sldId id="1262" r:id="rId22"/>
-    <p:sldId id="1263" r:id="rId23"/>
-    <p:sldId id="1264" r:id="rId24"/>
+    <p:sldId id="1265" r:id="rId22"/>
+    <p:sldId id="1266" r:id="rId23"/>
+    <p:sldId id="1267" r:id="rId24"/>
+    <p:sldId id="1262" r:id="rId25"/>
+    <p:sldId id="1263" r:id="rId26"/>
+    <p:sldId id="1264" r:id="rId27"/>
   </p:sldIdLst>
   <p:sldSz cx="9144000" cy="6858000" type="screen4x3"/>
   <p:notesSz cx="6797675" cy="9926638"/>
@@ -302,7 +305,7 @@
               <a:pPr>
                 <a:defRPr/>
               </a:pPr>
-              <a:t>15.03.2025</a:t>
+              <a:t>09.05.2025</a:t>
             </a:fld>
             <a:endParaRPr lang="de-AT"/>
           </a:p>
@@ -517,7 +520,7 @@
               <a:pPr>
                 <a:defRPr/>
               </a:pPr>
-              <a:t>15.03.2025</a:t>
+              <a:t>09.05.2025</a:t>
             </a:fld>
             <a:endParaRPr lang="de-AT"/>
           </a:p>
@@ -2211,6 +2214,13 @@
             </a:r>
           </a:p>
           <a:p>
+            <a:pPr lvl="1"/>
+            <a:r>
+              <a:rPr lang="de-AT" dirty="0"/>
+              <a:t>Design ist halbwegs responsiv</a:t>
+            </a:r>
+          </a:p>
+          <a:p>
             <a:r>
               <a:rPr lang="de-AT" dirty="0"/>
               <a:t>Primärer Benachrichtigungskanal</a:t>
@@ -2931,6 +2941,12 @@
               <a:t>Vorsicht mit Namensgebung</a:t>
             </a:r>
           </a:p>
+          <a:p>
+            <a:r>
+              <a:rPr lang="de-AT" dirty="0"/>
+              <a:t>Speziell für Tracking</a:t>
+            </a:r>
+          </a:p>
         </p:txBody>
       </p:sp>
       <p:pic>
@@ -3840,7 +3856,7 @@
           <p:cNvPr id="2" name="Titel 1">
             <a:extLst>
               <a:ext uri="{FF2B5EF4-FFF2-40B4-BE49-F238E27FC236}">
-                <a16:creationId xmlns:a16="http://schemas.microsoft.com/office/drawing/2014/main" id="{4DB55C6E-189D-5CB7-D8E5-F3D6727C2BAB}"/>
+                <a16:creationId xmlns:a16="http://schemas.microsoft.com/office/drawing/2014/main" id="{CAF9FA31-5F38-44AA-D0B2-03B6C6DAEF0A}"/>
               </a:ext>
             </a:extLst>
           </p:cNvPr>
@@ -3858,7 +3874,7 @@
           <a:p>
             <a:r>
               <a:rPr lang="de-AT" dirty="0"/>
-              <a:t>Schnellzugriff über Widget</a:t>
+              <a:t>Tracking - Einsatzmöglichkeiten</a:t>
             </a:r>
           </a:p>
         </p:txBody>
@@ -3868,7 +3884,7 @@
           <p:cNvPr id="3" name="Textplatzhalter 2">
             <a:extLst>
               <a:ext uri="{FF2B5EF4-FFF2-40B4-BE49-F238E27FC236}">
-                <a16:creationId xmlns:a16="http://schemas.microsoft.com/office/drawing/2014/main" id="{7F9E8FDC-94A0-1074-5A47-CC2AAF8E4E0B}"/>
+                <a16:creationId xmlns:a16="http://schemas.microsoft.com/office/drawing/2014/main" id="{DD5C5621-EC60-D527-8D8E-92F0CC0393B7}"/>
               </a:ext>
             </a:extLst>
           </p:cNvPr>
@@ -3886,41 +3902,65 @@
           <a:p>
             <a:r>
               <a:rPr lang="de-AT" dirty="0"/>
-              <a:t>Garagentor mit einem Click öffnen</a:t>
-            </a:r>
-          </a:p>
-          <a:p>
-            <a:r>
-              <a:rPr lang="de-AT" dirty="0"/>
-              <a:t>Widget erstellen</a:t>
-            </a:r>
-          </a:p>
-          <a:p>
-            <a:r>
-              <a:rPr lang="de-AT" dirty="0"/>
-              <a:t>Aktion mit </a:t>
-            </a:r>
-            <a:r>
-              <a:rPr lang="de-AT" dirty="0" err="1"/>
-              <a:t>Script</a:t>
-            </a:r>
-            <a:r>
-              <a:rPr lang="de-AT" dirty="0"/>
-              <a:t>-Aufruf verbinden</a:t>
-            </a:r>
-          </a:p>
-          <a:p>
-            <a:r>
-              <a:rPr lang="de-AT" dirty="0"/>
-              <a:t>Icon wählen</a:t>
-            </a:r>
+              <a:t>Einsatzmöglichkeiten</a:t>
+            </a:r>
+          </a:p>
+          <a:p>
+            <a:pPr lvl="1"/>
+            <a:r>
+              <a:rPr lang="de-AT" dirty="0"/>
+              <a:t>Alarmanlage aktivieren/deaktivieren</a:t>
+            </a:r>
+          </a:p>
+          <a:p>
+            <a:pPr lvl="1"/>
+            <a:r>
+              <a:rPr lang="de-AT" dirty="0"/>
+              <a:t>Garagentor öffnen bei Annäherung</a:t>
+            </a:r>
+          </a:p>
+          <a:p>
+            <a:pPr lvl="1"/>
+            <a:r>
+              <a:rPr lang="de-AT" dirty="0"/>
+              <a:t>…</a:t>
+            </a:r>
+          </a:p>
+          <a:p>
+            <a:r>
+              <a:rPr lang="de-AT" dirty="0"/>
+              <a:t>Herausforderungen</a:t>
+            </a:r>
+          </a:p>
+          <a:p>
+            <a:pPr lvl="1"/>
+            <a:r>
+              <a:rPr lang="de-AT" dirty="0"/>
+              <a:t>Handy versucht, Energie zu sparen </a:t>
+            </a:r>
+            <a:r>
+              <a:rPr lang="de-AT" dirty="0">
+                <a:sym typeface="Wingdings" panose="05000000000000000000" pitchFamily="2" charset="2"/>
+              </a:rPr>
+              <a:t> unregelmäßige Aktualisierung der Position</a:t>
+            </a:r>
+          </a:p>
+          <a:p>
+            <a:pPr lvl="1"/>
+            <a:r>
+              <a:rPr lang="de-AT" dirty="0">
+                <a:sym typeface="Wingdings" panose="05000000000000000000" pitchFamily="2" charset="2"/>
+              </a:rPr>
+              <a:t>Gewährleistung der Privatsphäre</a:t>
+            </a:r>
+            <a:endParaRPr lang="de-AT" dirty="0"/>
           </a:p>
         </p:txBody>
       </p:sp>
     </p:spTree>
     <p:extLst>
       <p:ext uri="{BB962C8B-B14F-4D97-AF65-F5344CB8AC3E}">
-        <p14:creationId xmlns:p14="http://schemas.microsoft.com/office/powerpoint/2010/main" val="3210915064"/>
+        <p14:creationId xmlns:p14="http://schemas.microsoft.com/office/powerpoint/2010/main" val="1616410265"/>
       </p:ext>
     </p:extLst>
   </p:cSld>
@@ -3952,7 +3992,7 @@
           <p:cNvPr id="2" name="Titel 1">
             <a:extLst>
               <a:ext uri="{FF2B5EF4-FFF2-40B4-BE49-F238E27FC236}">
-                <a16:creationId xmlns:a16="http://schemas.microsoft.com/office/drawing/2014/main" id="{B0F1FD67-F059-3A3C-FD03-DFE9DD9D0A50}"/>
+                <a16:creationId xmlns:a16="http://schemas.microsoft.com/office/drawing/2014/main" id="{DE5B359C-0637-6741-0B70-A3FDE20A1C3C}"/>
               </a:ext>
             </a:extLst>
           </p:cNvPr>
@@ -3969,8 +4009,12 @@
           <a:lstStyle/>
           <a:p>
             <a:r>
-              <a:rPr lang="de-AT" dirty="0"/>
-              <a:t>Widget erstellen</a:t>
+              <a:rPr lang="de-AT" dirty="0" err="1"/>
+              <a:t>Proximity</a:t>
+            </a:r>
+            <a:r>
+              <a:rPr lang="de-AT" dirty="0"/>
+              <a:t>-Integration</a:t>
             </a:r>
           </a:p>
         </p:txBody>
@@ -3980,7 +4024,7 @@
           <p:cNvPr id="3" name="Textplatzhalter 2">
             <a:extLst>
               <a:ext uri="{FF2B5EF4-FFF2-40B4-BE49-F238E27FC236}">
-                <a16:creationId xmlns:a16="http://schemas.microsoft.com/office/drawing/2014/main" id="{0CC357FA-1203-FE6A-201D-5597418F2889}"/>
+                <a16:creationId xmlns:a16="http://schemas.microsoft.com/office/drawing/2014/main" id="{6AD286A1-D97A-91DF-18FF-CC21DA7A7FB5}"/>
               </a:ext>
             </a:extLst>
           </p:cNvPr>
@@ -3996,12 +4040,417 @@
           <a:bodyPr/>
           <a:lstStyle/>
           <a:p>
+            <a:endParaRPr lang="de-AT" dirty="0"/>
+          </a:p>
+        </p:txBody>
+      </p:sp>
+      <p:pic>
+        <p:nvPicPr>
+          <p:cNvPr id="5" name="Grafik 4">
+            <a:extLst>
+              <a:ext uri="{FF2B5EF4-FFF2-40B4-BE49-F238E27FC236}">
+                <a16:creationId xmlns:a16="http://schemas.microsoft.com/office/drawing/2014/main" id="{8D76BDB6-B539-E88D-7953-B2CE93746C95}"/>
+              </a:ext>
+            </a:extLst>
+          </p:cNvPr>
+          <p:cNvPicPr>
+            <a:picLocks noChangeAspect="1"/>
+          </p:cNvPicPr>
+          <p:nvPr/>
+        </p:nvPicPr>
+        <p:blipFill>
+          <a:blip r:embed="rId2"/>
+          <a:stretch>
+            <a:fillRect/>
+          </a:stretch>
+        </p:blipFill>
+        <p:spPr>
+          <a:xfrm>
+            <a:off x="251520" y="1086664"/>
+            <a:ext cx="8640960" cy="4684672"/>
+          </a:xfrm>
+          <a:prstGeom prst="rect">
+            <a:avLst/>
+          </a:prstGeom>
+        </p:spPr>
+      </p:pic>
+    </p:spTree>
+    <p:extLst>
+      <p:ext uri="{BB962C8B-B14F-4D97-AF65-F5344CB8AC3E}">
+        <p14:creationId xmlns:p14="http://schemas.microsoft.com/office/powerpoint/2010/main" val="2335389465"/>
+      </p:ext>
+    </p:extLst>
+  </p:cSld>
+  <p:clrMapOvr>
+    <a:masterClrMapping/>
+  </p:clrMapOvr>
+</p:sld>
+</file>
+
+<file path=ppt/slides/slide23.xml><?xml version="1.0" encoding="utf-8"?>
+<p:sld xmlns:a="http://schemas.openxmlformats.org/drawingml/2006/main" xmlns:r="http://schemas.openxmlformats.org/officeDocument/2006/relationships" xmlns:p="http://schemas.openxmlformats.org/presentationml/2006/main">
+  <p:cSld>
+    <p:spTree>
+      <p:nvGrpSpPr>
+        <p:cNvPr id="1" name=""/>
+        <p:cNvGrpSpPr/>
+        <p:nvPr/>
+      </p:nvGrpSpPr>
+      <p:grpSpPr>
+        <a:xfrm>
+          <a:off x="0" y="0"/>
+          <a:ext cx="0" cy="0"/>
+          <a:chOff x="0" y="0"/>
+          <a:chExt cx="0" cy="0"/>
+        </a:xfrm>
+      </p:grpSpPr>
+      <p:sp>
+        <p:nvSpPr>
+          <p:cNvPr id="2" name="Titel 1">
+            <a:extLst>
+              <a:ext uri="{FF2B5EF4-FFF2-40B4-BE49-F238E27FC236}">
+                <a16:creationId xmlns:a16="http://schemas.microsoft.com/office/drawing/2014/main" id="{C98D57C6-AB2F-6CF6-BF36-59D3800C0473}"/>
+              </a:ext>
+            </a:extLst>
+          </p:cNvPr>
+          <p:cNvSpPr>
+            <a:spLocks noGrp="1"/>
+          </p:cNvSpPr>
+          <p:nvPr>
+            <p:ph type="title"/>
+          </p:nvPr>
+        </p:nvSpPr>
+        <p:spPr/>
+        <p:txBody>
+          <a:bodyPr/>
+          <a:lstStyle/>
+          <a:p>
+            <a:r>
+              <a:rPr lang="de-AT" dirty="0"/>
+              <a:t>Leider zeitlich nicht gut aufgelöst</a:t>
+            </a:r>
+          </a:p>
+        </p:txBody>
+      </p:sp>
+      <p:sp>
+        <p:nvSpPr>
+          <p:cNvPr id="3" name="Textplatzhalter 2">
+            <a:extLst>
+              <a:ext uri="{FF2B5EF4-FFF2-40B4-BE49-F238E27FC236}">
+                <a16:creationId xmlns:a16="http://schemas.microsoft.com/office/drawing/2014/main" id="{DD969E26-6B47-D241-5DD1-365B31824261}"/>
+              </a:ext>
+            </a:extLst>
+          </p:cNvPr>
+          <p:cNvSpPr>
+            <a:spLocks noGrp="1"/>
+          </p:cNvSpPr>
+          <p:nvPr>
+            <p:ph type="body" sz="quarter" idx="10"/>
+          </p:nvPr>
+        </p:nvSpPr>
+        <p:spPr/>
+        <p:txBody>
+          <a:bodyPr/>
+          <a:lstStyle/>
+          <a:p>
+            <a:r>
+              <a:rPr lang="de-AT" sz="2400" dirty="0"/>
+              <a:t>Versuch mit </a:t>
+            </a:r>
+            <a:r>
+              <a:rPr lang="de-AT" sz="2400" dirty="0" err="1"/>
+              <a:t>GpsLogger</a:t>
+            </a:r>
+            <a:r>
+              <a:rPr lang="de-AT" sz="2400" dirty="0"/>
+              <a:t> abgebrochen, weil er zu viel Energie benötigt</a:t>
+            </a:r>
+          </a:p>
+        </p:txBody>
+      </p:sp>
+      <p:pic>
+        <p:nvPicPr>
+          <p:cNvPr id="5" name="Grafik 4">
+            <a:extLst>
+              <a:ext uri="{FF2B5EF4-FFF2-40B4-BE49-F238E27FC236}">
+                <a16:creationId xmlns:a16="http://schemas.microsoft.com/office/drawing/2014/main" id="{EDE6C2AE-5D71-158D-2CFA-F409BFE052BC}"/>
+              </a:ext>
+            </a:extLst>
+          </p:cNvPr>
+          <p:cNvPicPr>
+            <a:picLocks noChangeAspect="1"/>
+          </p:cNvPicPr>
+          <p:nvPr/>
+        </p:nvPicPr>
+        <p:blipFill>
+          <a:blip r:embed="rId2"/>
+          <a:stretch>
+            <a:fillRect/>
+          </a:stretch>
+        </p:blipFill>
+        <p:spPr>
+          <a:xfrm>
+            <a:off x="-151532" y="2564904"/>
+            <a:ext cx="9295532" cy="2907360"/>
+          </a:xfrm>
+          <a:prstGeom prst="rect">
+            <a:avLst/>
+          </a:prstGeom>
+        </p:spPr>
+      </p:pic>
+    </p:spTree>
+    <p:extLst>
+      <p:ext uri="{BB962C8B-B14F-4D97-AF65-F5344CB8AC3E}">
+        <p14:creationId xmlns:p14="http://schemas.microsoft.com/office/powerpoint/2010/main" val="3874790149"/>
+      </p:ext>
+    </p:extLst>
+  </p:cSld>
+  <p:clrMapOvr>
+    <a:masterClrMapping/>
+  </p:clrMapOvr>
+</p:sld>
+</file>
+
+<file path=ppt/slides/slide24.xml><?xml version="1.0" encoding="utf-8"?>
+<p:sld xmlns:a="http://schemas.openxmlformats.org/drawingml/2006/main" xmlns:r="http://schemas.openxmlformats.org/officeDocument/2006/relationships" xmlns:p="http://schemas.openxmlformats.org/presentationml/2006/main">
+  <p:cSld>
+    <p:spTree>
+      <p:nvGrpSpPr>
+        <p:cNvPr id="1" name=""/>
+        <p:cNvGrpSpPr/>
+        <p:nvPr/>
+      </p:nvGrpSpPr>
+      <p:grpSpPr>
+        <a:xfrm>
+          <a:off x="0" y="0"/>
+          <a:ext cx="0" cy="0"/>
+          <a:chOff x="0" y="0"/>
+          <a:chExt cx="0" cy="0"/>
+        </a:xfrm>
+      </p:grpSpPr>
+      <p:sp>
+        <p:nvSpPr>
+          <p:cNvPr id="2" name="Titel 1">
+            <a:extLst>
+              <a:ext uri="{FF2B5EF4-FFF2-40B4-BE49-F238E27FC236}">
+                <a16:creationId xmlns:a16="http://schemas.microsoft.com/office/drawing/2014/main" id="{4DB55C6E-189D-5CB7-D8E5-F3D6727C2BAB}"/>
+              </a:ext>
+            </a:extLst>
+          </p:cNvPr>
+          <p:cNvSpPr>
+            <a:spLocks noGrp="1"/>
+          </p:cNvSpPr>
+          <p:nvPr>
+            <p:ph type="title"/>
+          </p:nvPr>
+        </p:nvSpPr>
+        <p:spPr/>
+        <p:txBody>
+          <a:bodyPr/>
+          <a:lstStyle/>
+          <a:p>
+            <a:r>
+              <a:rPr lang="de-AT" dirty="0"/>
+              <a:t>Schnellzugriff über Widget</a:t>
+            </a:r>
+          </a:p>
+        </p:txBody>
+      </p:sp>
+      <p:sp>
+        <p:nvSpPr>
+          <p:cNvPr id="3" name="Textplatzhalter 2">
+            <a:extLst>
+              <a:ext uri="{FF2B5EF4-FFF2-40B4-BE49-F238E27FC236}">
+                <a16:creationId xmlns:a16="http://schemas.microsoft.com/office/drawing/2014/main" id="{7F9E8FDC-94A0-1074-5A47-CC2AAF8E4E0B}"/>
+              </a:ext>
+            </a:extLst>
+          </p:cNvPr>
+          <p:cNvSpPr>
+            <a:spLocks noGrp="1"/>
+          </p:cNvSpPr>
+          <p:nvPr>
+            <p:ph type="body" sz="quarter" idx="10"/>
+          </p:nvPr>
+        </p:nvSpPr>
+        <p:spPr/>
+        <p:txBody>
+          <a:bodyPr/>
+          <a:lstStyle/>
+          <a:p>
+            <a:r>
+              <a:rPr lang="de-AT" dirty="0"/>
+              <a:t>Garagentor mit einem Click öffnen</a:t>
+            </a:r>
+          </a:p>
+          <a:p>
+            <a:r>
+              <a:rPr lang="de-AT" dirty="0"/>
+              <a:t>Widget erstellen</a:t>
+            </a:r>
+          </a:p>
+          <a:p>
+            <a:r>
+              <a:rPr lang="de-AT" dirty="0"/>
+              <a:t>Aktion mit </a:t>
+            </a:r>
+            <a:r>
+              <a:rPr lang="de-AT" dirty="0" err="1"/>
+              <a:t>Script</a:t>
+            </a:r>
+            <a:r>
+              <a:rPr lang="de-AT" dirty="0"/>
+              <a:t>-Aufruf verbinden</a:t>
+            </a:r>
+          </a:p>
+          <a:p>
+            <a:r>
+              <a:rPr lang="de-AT" dirty="0"/>
+              <a:t>Icon wählen</a:t>
+            </a:r>
+          </a:p>
+        </p:txBody>
+      </p:sp>
+    </p:spTree>
+    <p:extLst>
+      <p:ext uri="{BB962C8B-B14F-4D97-AF65-F5344CB8AC3E}">
+        <p14:creationId xmlns:p14="http://schemas.microsoft.com/office/powerpoint/2010/main" val="3210915064"/>
+      </p:ext>
+    </p:extLst>
+  </p:cSld>
+  <p:clrMapOvr>
+    <a:masterClrMapping/>
+  </p:clrMapOvr>
+</p:sld>
+</file>
+
+<file path=ppt/slides/slide25.xml><?xml version="1.0" encoding="utf-8"?>
+<p:sld xmlns:a="http://schemas.openxmlformats.org/drawingml/2006/main" xmlns:r="http://schemas.openxmlformats.org/officeDocument/2006/relationships" xmlns:p="http://schemas.openxmlformats.org/presentationml/2006/main">
+  <p:cSld>
+    <p:spTree>
+      <p:nvGrpSpPr>
+        <p:cNvPr id="1" name=""/>
+        <p:cNvGrpSpPr/>
+        <p:nvPr/>
+      </p:nvGrpSpPr>
+      <p:grpSpPr>
+        <a:xfrm>
+          <a:off x="0" y="0"/>
+          <a:ext cx="0" cy="0"/>
+          <a:chOff x="0" y="0"/>
+          <a:chExt cx="0" cy="0"/>
+        </a:xfrm>
+      </p:grpSpPr>
+      <p:sp>
+        <p:nvSpPr>
+          <p:cNvPr id="2" name="Titel 1">
+            <a:extLst>
+              <a:ext uri="{FF2B5EF4-FFF2-40B4-BE49-F238E27FC236}">
+                <a16:creationId xmlns:a16="http://schemas.microsoft.com/office/drawing/2014/main" id="{B0F1FD67-F059-3A3C-FD03-DFE9DD9D0A50}"/>
+              </a:ext>
+            </a:extLst>
+          </p:cNvPr>
+          <p:cNvSpPr>
+            <a:spLocks noGrp="1"/>
+          </p:cNvSpPr>
+          <p:nvPr>
+            <p:ph type="title"/>
+          </p:nvPr>
+        </p:nvSpPr>
+        <p:spPr/>
+        <p:txBody>
+          <a:bodyPr/>
+          <a:lstStyle/>
+          <a:p>
+            <a:r>
+              <a:rPr lang="de-AT" dirty="0"/>
+              <a:t>Widget erstellen – Trigger für HA</a:t>
+            </a:r>
+          </a:p>
+        </p:txBody>
+      </p:sp>
+      <p:sp>
+        <p:nvSpPr>
+          <p:cNvPr id="3" name="Textplatzhalter 2">
+            <a:extLst>
+              <a:ext uri="{FF2B5EF4-FFF2-40B4-BE49-F238E27FC236}">
+                <a16:creationId xmlns:a16="http://schemas.microsoft.com/office/drawing/2014/main" id="{0CC357FA-1203-FE6A-201D-5597418F2889}"/>
+              </a:ext>
+            </a:extLst>
+          </p:cNvPr>
+          <p:cNvSpPr>
+            <a:spLocks noGrp="1"/>
+          </p:cNvSpPr>
+          <p:nvPr>
+            <p:ph type="body" sz="quarter" idx="10"/>
+          </p:nvPr>
+        </p:nvSpPr>
+        <p:spPr>
+          <a:xfrm>
+            <a:off x="179512" y="1268760"/>
+            <a:ext cx="8207375" cy="4608165"/>
+          </a:xfrm>
+        </p:spPr>
+        <p:txBody>
+          <a:bodyPr/>
+          <a:lstStyle/>
+          <a:p>
+            <a:r>
+              <a:rPr lang="de-AT" dirty="0"/>
+              <a:t>Sonst</a:t>
+            </a:r>
+            <a:br>
+              <a:rPr lang="de-AT" dirty="0"/>
+            </a:br>
+            <a:r>
+              <a:rPr lang="de-AT" dirty="0"/>
+              <a:t>HA starten</a:t>
+            </a:r>
+            <a:br>
+              <a:rPr lang="de-AT" dirty="0"/>
+            </a:br>
+            <a:r>
+              <a:rPr lang="de-AT" dirty="0"/>
+              <a:t>Dashboard wählen</a:t>
+            </a:r>
+            <a:br>
+              <a:rPr lang="de-AT" dirty="0"/>
+            </a:br>
+            <a:r>
+              <a:rPr lang="de-AT" dirty="0"/>
+              <a:t>Button drücken</a:t>
+            </a:r>
+          </a:p>
+          <a:p>
+            <a:r>
+              <a:rPr lang="de-AT" dirty="0"/>
+              <a:t>Widget</a:t>
+            </a:r>
+            <a:br>
+              <a:rPr lang="de-AT" dirty="0"/>
+            </a:br>
+            <a:r>
+              <a:rPr lang="de-AT" dirty="0"/>
+              <a:t>Ein Click genügt</a:t>
+            </a:r>
+          </a:p>
+          <a:p>
+            <a:endParaRPr lang="de-AT" dirty="0"/>
+          </a:p>
+          <a:p>
+            <a:r>
+              <a:rPr lang="de-AT" dirty="0"/>
+              <a:t>Einrichten</a:t>
+            </a:r>
+          </a:p>
+          <a:p>
+            <a:pPr lvl="1"/>
             <a:r>
               <a:rPr lang="de-AT" dirty="0"/>
               <a:t>Long Press</a:t>
             </a:r>
           </a:p>
           <a:p>
+            <a:pPr lvl="1"/>
             <a:r>
               <a:rPr lang="de-AT" dirty="0"/>
               <a:t>HA suchen</a:t>
@@ -4082,7 +4531,7 @@
 </p:sld>
 </file>
 
-<file path=ppt/slides/slide23.xml><?xml version="1.0" encoding="utf-8"?>
+<file path=ppt/slides/slide26.xml><?xml version="1.0" encoding="utf-8"?>
 <p:sld xmlns:a="http://schemas.openxmlformats.org/drawingml/2006/main" xmlns:r="http://schemas.openxmlformats.org/officeDocument/2006/relationships" xmlns:p="http://schemas.openxmlformats.org/presentationml/2006/main">
   <p:cSld>
     <p:spTree>
@@ -4325,13 +4774,8 @@
             <a:pPr lvl="2"/>
             <a:r>
               <a:rPr lang="de-AT" dirty="0"/>
-              <a:t>App zweimal </a:t>
-            </a:r>
-            <a:r>
-              <a:rPr lang="de-AT" dirty="0" err="1"/>
-              <a:t>instalieren</a:t>
-            </a:r>
-            <a:endParaRPr lang="de-AT" dirty="0"/>
+              <a:t>App zweimal installieren</a:t>
+            </a:r>
           </a:p>
           <a:p>
             <a:pPr lvl="2"/>
